--- a/NBA_Presentation_4K.pptx
+++ b/NBA_Presentation_4K.pptx
@@ -2800,6 +2800,9 @@
   <p:clrMapOvr>
     <a:masterClrMapping/>
   </p:clrMapOvr>
+  <p:transition spd="slow">
+    <p:fade thruBlk="1"/>
+  </p:transition>
 </p:sld>
 </file>
 
@@ -3224,6 +3227,9 @@
   <p:clrMapOvr>
     <a:masterClrMapping/>
   </p:clrMapOvr>
+  <p:transition spd="slow">
+    <p:fade thruBlk="1"/>
+  </p:transition>
 </p:sld>
 </file>
 
@@ -3920,6 +3926,9 @@
   <p:clrMapOvr>
     <a:masterClrMapping/>
   </p:clrMapOvr>
+  <p:transition spd="med">
+    <p:push dir="u"/>
+  </p:transition>
 </p:sld>
 </file>
 
@@ -6615,6 +6624,9 @@
   <p:clrMapOvr>
     <a:masterClrMapping/>
   </p:clrMapOvr>
+  <p:transition spd="med">
+    <p:wipe dir="r"/>
+  </p:transition>
 </p:sld>
 </file>
 
@@ -9310,6 +9322,9 @@
   <p:clrMapOvr>
     <a:masterClrMapping/>
   </p:clrMapOvr>
+  <p:transition spd="med">
+    <p:wipe dir="r"/>
+  </p:transition>
 </p:sld>
 </file>
 
@@ -10630,6 +10645,9 @@
   <p:clrMapOvr>
     <a:masterClrMapping/>
   </p:clrMapOvr>
+  <p:transition spd="med">
+    <p:fade/>
+  </p:transition>
 </p:sld>
 </file>
 
@@ -11213,6 +11231,9 @@
   <p:clrMapOvr>
     <a:masterClrMapping/>
   </p:clrMapOvr>
+  <p:transition spd="med">
+    <p:push dir="l"/>
+  </p:transition>
 </p:sld>
 </file>
 
@@ -13987,6 +14008,9 @@
   <p:clrMapOvr>
     <a:masterClrMapping/>
   </p:clrMapOvr>
+  <p:transition spd="med">
+    <p:zoom dir="out"/>
+  </p:transition>
 </p:sld>
 </file>
 
@@ -15013,6 +15037,9 @@
   <p:clrMapOvr>
     <a:masterClrMapping/>
   </p:clrMapOvr>
+  <p:transition spd="med">
+    <p:push dir="u"/>
+  </p:transition>
 </p:sld>
 </file>
 
@@ -15671,6 +15698,9 @@
   <p:clrMapOvr>
     <a:masterClrMapping/>
   </p:clrMapOvr>
+  <p:transition spd="med">
+    <p:fade/>
+  </p:transition>
 </p:sld>
 </file>
 
